--- a/juanrey/EOS26_Hands-on_scripting_JuanR.pptx
+++ b/juanrey/EOS26_Hands-on_scripting_JuanR.pptx
@@ -6,17 +6,19 @@
     <p:sldMasterId id="2147483683" r:id="rId2"/>
   </p:sldMasterIdLst>
   <p:notesMasterIdLst>
-    <p:notesMasterId r:id="rId11"/>
+    <p:notesMasterId r:id="rId13"/>
   </p:notesMasterIdLst>
   <p:sldIdLst>
     <p:sldId id="265" r:id="rId3"/>
     <p:sldId id="551" r:id="rId4"/>
-    <p:sldId id="610" r:id="rId5"/>
-    <p:sldId id="626" r:id="rId6"/>
-    <p:sldId id="628" r:id="rId7"/>
-    <p:sldId id="627" r:id="rId8"/>
-    <p:sldId id="629" r:id="rId9"/>
-    <p:sldId id="625" r:id="rId10"/>
+    <p:sldId id="630" r:id="rId5"/>
+    <p:sldId id="610" r:id="rId6"/>
+    <p:sldId id="626" r:id="rId7"/>
+    <p:sldId id="628" r:id="rId8"/>
+    <p:sldId id="631" r:id="rId9"/>
+    <p:sldId id="627" r:id="rId10"/>
+    <p:sldId id="629" r:id="rId11"/>
+    <p:sldId id="625" r:id="rId12"/>
   </p:sldIdLst>
   <p:sldSz cx="9144000" cy="5143500" type="screen16x9"/>
   <p:notesSz cx="6858000" cy="9144000"/>
@@ -1630,7 +1632,7 @@
             <a:fld id="{9351F72D-EA3D-46A2-B53E-E9378EBFE7FE}" type="datetimeFigureOut">
               <a:rPr lang="en-GB" smtClean="0"/>
               <a:pPr/>
-              <a:t>14/05/2026</a:t>
+              <a:t>16/05/2026</a:t>
             </a:fld>
             <a:endParaRPr lang="en-GB" dirty="0"/>
           </a:p>
@@ -1792,7 +1794,7 @@
             <a:fld id="{9351F72D-EA3D-46A2-B53E-E9378EBFE7FE}" type="datetimeFigureOut">
               <a:rPr lang="en-GB" smtClean="0"/>
               <a:pPr/>
-              <a:t>14/05/2026</a:t>
+              <a:t>16/05/2026</a:t>
             </a:fld>
             <a:endParaRPr lang="en-GB" dirty="0"/>
           </a:p>
@@ -1925,7 +1927,7 @@
             <a:fld id="{9351F72D-EA3D-46A2-B53E-E9378EBFE7FE}" type="datetimeFigureOut">
               <a:rPr lang="en-GB" smtClean="0"/>
               <a:pPr/>
-              <a:t>14/05/2026</a:t>
+              <a:t>16/05/2026</a:t>
             </a:fld>
             <a:endParaRPr lang="en-GB" dirty="0"/>
           </a:p>
@@ -2296,7 +2298,7 @@
             <a:fld id="{9351F72D-EA3D-46A2-B53E-E9378EBFE7FE}" type="datetimeFigureOut">
               <a:rPr lang="en-GB" smtClean="0"/>
               <a:pPr/>
-              <a:t>14/05/2026</a:t>
+              <a:t>16/05/2026</a:t>
             </a:fld>
             <a:endParaRPr lang="en-GB" dirty="0"/>
           </a:p>
@@ -2643,7 +2645,7 @@
             <a:fld id="{9351F72D-EA3D-46A2-B53E-E9378EBFE7FE}" type="datetimeFigureOut">
               <a:rPr lang="en-GB" smtClean="0"/>
               <a:pPr/>
-              <a:t>14/05/2026</a:t>
+              <a:t>16/05/2026</a:t>
             </a:fld>
             <a:endParaRPr lang="en-GB" dirty="0"/>
           </a:p>
@@ -2863,7 +2865,7 @@
             <a:fld id="{9351F72D-EA3D-46A2-B53E-E9378EBFE7FE}" type="datetimeFigureOut">
               <a:rPr lang="en-GB" smtClean="0"/>
               <a:pPr/>
-              <a:t>14/05/2026</a:t>
+              <a:t>16/05/2026</a:t>
             </a:fld>
             <a:endParaRPr lang="en-GB" dirty="0"/>
           </a:p>
@@ -3093,7 +3095,7 @@
             <a:fld id="{9351F72D-EA3D-46A2-B53E-E9378EBFE7FE}" type="datetimeFigureOut">
               <a:rPr lang="en-GB" smtClean="0"/>
               <a:pPr/>
-              <a:t>14/05/2026</a:t>
+              <a:t>16/05/2026</a:t>
             </a:fld>
             <a:endParaRPr lang="en-GB" dirty="0"/>
           </a:p>
@@ -4434,7 +4436,7 @@
           <a:p>
             <a:fld id="{9351F72D-EA3D-46A2-B53E-E9378EBFE7FE}" type="datetimeFigureOut">
               <a:rPr lang="en-GB" smtClean="0"/>
-              <a:t>14/05/2026</a:t>
+              <a:t>16/05/2026</a:t>
             </a:fld>
             <a:endParaRPr lang="en-GB"/>
           </a:p>
@@ -4634,7 +4636,7 @@
           <a:p>
             <a:fld id="{9351F72D-EA3D-46A2-B53E-E9378EBFE7FE}" type="datetimeFigureOut">
               <a:rPr lang="en-GB" smtClean="0"/>
-              <a:t>14/05/2026</a:t>
+              <a:t>16/05/2026</a:t>
             </a:fld>
             <a:endParaRPr lang="en-GB"/>
           </a:p>
@@ -4925,7 +4927,7 @@
             <a:fld id="{9351F72D-EA3D-46A2-B53E-E9378EBFE7FE}" type="datetimeFigureOut">
               <a:rPr lang="en-GB" smtClean="0"/>
               <a:pPr/>
-              <a:t>14/05/2026</a:t>
+              <a:t>16/05/2026</a:t>
             </a:fld>
             <a:endParaRPr lang="en-GB" dirty="0"/>
           </a:p>
@@ -5213,7 +5215,7 @@
             <a:fld id="{9351F72D-EA3D-46A2-B53E-E9378EBFE7FE}" type="datetimeFigureOut">
               <a:rPr lang="en-GB" smtClean="0"/>
               <a:pPr/>
-              <a:t>14/05/2026</a:t>
+              <a:t>16/05/2026</a:t>
             </a:fld>
             <a:endParaRPr lang="en-GB" dirty="0"/>
           </a:p>
@@ -6551,7 +6553,7 @@
           <a:p>
             <a:fld id="{9351F72D-EA3D-46A2-B53E-E9378EBFE7FE}" type="datetimeFigureOut">
               <a:rPr lang="en-GB" smtClean="0"/>
-              <a:t>14/05/2026</a:t>
+              <a:t>16/05/2026</a:t>
             </a:fld>
             <a:endParaRPr lang="en-GB"/>
           </a:p>
@@ -7354,6 +7356,367 @@
 </p:sld>
 </file>
 
+<file path=ppt/slides/slide10.xml><?xml version="1.0" encoding="utf-8"?>
+<p:sld xmlns:a="http://schemas.openxmlformats.org/drawingml/2006/main" xmlns:r="http://schemas.openxmlformats.org/officeDocument/2006/relationships" xmlns:p="http://schemas.openxmlformats.org/presentationml/2006/main">
+  <p:cSld>
+    <p:spTree>
+      <p:nvGrpSpPr>
+        <p:cNvPr id="1" name="">
+          <a:extLst>
+            <a:ext uri="{FF2B5EF4-FFF2-40B4-BE49-F238E27FC236}">
+              <a16:creationId xmlns:a16="http://schemas.microsoft.com/office/drawing/2014/main" id="{7A8F851E-D277-932A-4633-D8CD0698C828}"/>
+            </a:ext>
+          </a:extLst>
+        </p:cNvPr>
+        <p:cNvGrpSpPr/>
+        <p:nvPr/>
+      </p:nvGrpSpPr>
+      <p:grpSpPr>
+        <a:xfrm>
+          <a:off x="0" y="0"/>
+          <a:ext cx="0" cy="0"/>
+          <a:chOff x="0" y="0"/>
+          <a:chExt cx="0" cy="0"/>
+        </a:xfrm>
+      </p:grpSpPr>
+      <p:sp>
+        <p:nvSpPr>
+          <p:cNvPr id="4" name="Slide Number Placeholder 3">
+            <a:extLst>
+              <a:ext uri="{FF2B5EF4-FFF2-40B4-BE49-F238E27FC236}">
+                <a16:creationId xmlns:a16="http://schemas.microsoft.com/office/drawing/2014/main" id="{D95C8397-D63C-7691-BB87-3EFDB9376A2A}"/>
+              </a:ext>
+            </a:extLst>
+          </p:cNvPr>
+          <p:cNvSpPr>
+            <a:spLocks noGrp="1"/>
+          </p:cNvSpPr>
+          <p:nvPr>
+            <p:ph type="sldNum" idx="12"/>
+          </p:nvPr>
+        </p:nvSpPr>
+        <p:spPr/>
+        <p:txBody>
+          <a:bodyPr/>
+          <a:lstStyle/>
+          <a:p>
+            <a:pPr marL="0" lvl="0" indent="0" algn="r" rtl="0">
+              <a:spcBef>
+                <a:spcPts val="0"/>
+              </a:spcBef>
+              <a:spcAft>
+                <a:spcPts val="0"/>
+              </a:spcAft>
+              <a:buNone/>
+            </a:pPr>
+            <a:fld id="{00000000-1234-1234-1234-123412341234}" type="slidenum">
+              <a:rPr lang="en-GB" noProof="0" smtClean="0"/>
+              <a:t>10</a:t>
+            </a:fld>
+            <a:endParaRPr lang="en-GB" noProof="0" dirty="0"/>
+          </a:p>
+        </p:txBody>
+      </p:sp>
+      <p:sp>
+        <p:nvSpPr>
+          <p:cNvPr id="11" name="Title 1">
+            <a:extLst>
+              <a:ext uri="{FF2B5EF4-FFF2-40B4-BE49-F238E27FC236}">
+                <a16:creationId xmlns:a16="http://schemas.microsoft.com/office/drawing/2014/main" id="{95165B9C-6AB7-40E6-87AB-3AEB8367E436}"/>
+              </a:ext>
+            </a:extLst>
+          </p:cNvPr>
+          <p:cNvSpPr txBox="1">
+            <a:spLocks/>
+          </p:cNvSpPr>
+          <p:nvPr/>
+        </p:nvSpPr>
+        <p:spPr>
+          <a:xfrm>
+            <a:off x="1920124" y="2435486"/>
+            <a:ext cx="4787499" cy="612930"/>
+          </a:xfrm>
+          <a:prstGeom prst="rect">
+            <a:avLst/>
+          </a:prstGeom>
+          <a:noFill/>
+          <a:ln>
+            <a:noFill/>
+          </a:ln>
+        </p:spPr>
+        <p:txBody>
+          <a:bodyPr spcFirstLastPara="1" wrap="square" lIns="91425" tIns="91425" rIns="91425" bIns="91425" anchor="t" anchorCtr="0">
+            <a:spAutoFit/>
+          </a:bodyPr>
+          <a:lstStyle>
+            <a:defPPr marR="0" lvl="0" algn="l" rtl="0">
+              <a:lnSpc>
+                <a:spcPct val="100000"/>
+              </a:lnSpc>
+              <a:spcBef>
+                <a:spcPts val="0"/>
+              </a:spcBef>
+              <a:spcAft>
+                <a:spcPts val="0"/>
+              </a:spcAft>
+            </a:defPPr>
+            <a:lvl1pPr marR="0" lvl="0" algn="l" rtl="0">
+              <a:lnSpc>
+                <a:spcPct val="100000"/>
+              </a:lnSpc>
+              <a:spcBef>
+                <a:spcPts val="0"/>
+              </a:spcBef>
+              <a:spcAft>
+                <a:spcPts val="0"/>
+              </a:spcAft>
+              <a:buClr>
+                <a:srgbClr val="000000"/>
+              </a:buClr>
+              <a:buSzPts val="2500"/>
+              <a:buFont typeface="Arial"/>
+              <a:buNone/>
+              <a:defRPr sz="2400" b="1" i="0" u="none" strike="noStrike" cap="none">
+                <a:solidFill>
+                  <a:srgbClr val="254061"/>
+                </a:solidFill>
+                <a:latin typeface="Candara" panose="020E0502030303020204" pitchFamily="34" charset="0"/>
+                <a:ea typeface="Arial"/>
+                <a:cs typeface="Arial"/>
+                <a:sym typeface="Arial"/>
+              </a:defRPr>
+            </a:lvl1pPr>
+            <a:lvl2pPr marR="0" lvl="1" algn="l" rtl="0">
+              <a:lnSpc>
+                <a:spcPct val="100000"/>
+              </a:lnSpc>
+              <a:spcBef>
+                <a:spcPts val="0"/>
+              </a:spcBef>
+              <a:spcAft>
+                <a:spcPts val="0"/>
+              </a:spcAft>
+              <a:buClr>
+                <a:srgbClr val="000000"/>
+              </a:buClr>
+              <a:buSzPts val="2500"/>
+              <a:buFont typeface="Arial"/>
+              <a:buNone/>
+              <a:defRPr sz="2500" b="1" i="0" u="none" strike="noStrike" cap="none">
+                <a:solidFill>
+                  <a:srgbClr val="000000"/>
+                </a:solidFill>
+                <a:latin typeface="Candara" panose="020E0502030303020204" pitchFamily="34" charset="0"/>
+                <a:ea typeface="Arial"/>
+                <a:cs typeface="Arial"/>
+                <a:sym typeface="Arial"/>
+              </a:defRPr>
+            </a:lvl2pPr>
+            <a:lvl3pPr marR="0" lvl="2" algn="l" rtl="0">
+              <a:lnSpc>
+                <a:spcPct val="100000"/>
+              </a:lnSpc>
+              <a:spcBef>
+                <a:spcPts val="0"/>
+              </a:spcBef>
+              <a:spcAft>
+                <a:spcPts val="0"/>
+              </a:spcAft>
+              <a:buClr>
+                <a:srgbClr val="000000"/>
+              </a:buClr>
+              <a:buSzPts val="2500"/>
+              <a:buFont typeface="Arial"/>
+              <a:buNone/>
+              <a:defRPr sz="2500" b="1" i="0" u="none" strike="noStrike" cap="none">
+                <a:solidFill>
+                  <a:srgbClr val="000000"/>
+                </a:solidFill>
+                <a:latin typeface="Candara" panose="020E0502030303020204" pitchFamily="34" charset="0"/>
+                <a:ea typeface="Arial"/>
+                <a:cs typeface="Arial"/>
+                <a:sym typeface="Arial"/>
+              </a:defRPr>
+            </a:lvl3pPr>
+            <a:lvl4pPr marR="0" lvl="3" algn="l" rtl="0">
+              <a:lnSpc>
+                <a:spcPct val="100000"/>
+              </a:lnSpc>
+              <a:spcBef>
+                <a:spcPts val="0"/>
+              </a:spcBef>
+              <a:spcAft>
+                <a:spcPts val="0"/>
+              </a:spcAft>
+              <a:buClr>
+                <a:srgbClr val="000000"/>
+              </a:buClr>
+              <a:buSzPts val="2500"/>
+              <a:buFont typeface="Arial"/>
+              <a:buNone/>
+              <a:defRPr sz="2500" b="1" i="0" u="none" strike="noStrike" cap="none">
+                <a:solidFill>
+                  <a:srgbClr val="000000"/>
+                </a:solidFill>
+                <a:latin typeface="Candara" panose="020E0502030303020204" pitchFamily="34" charset="0"/>
+                <a:ea typeface="Arial"/>
+                <a:cs typeface="Arial"/>
+                <a:sym typeface="Arial"/>
+              </a:defRPr>
+            </a:lvl4pPr>
+            <a:lvl5pPr marR="0" lvl="4" algn="l" rtl="0">
+              <a:lnSpc>
+                <a:spcPct val="100000"/>
+              </a:lnSpc>
+              <a:spcBef>
+                <a:spcPts val="0"/>
+              </a:spcBef>
+              <a:spcAft>
+                <a:spcPts val="0"/>
+              </a:spcAft>
+              <a:buClr>
+                <a:srgbClr val="000000"/>
+              </a:buClr>
+              <a:buSzPts val="2500"/>
+              <a:buFont typeface="Arial"/>
+              <a:buNone/>
+              <a:defRPr sz="2500" b="1" i="0" u="none" strike="noStrike" cap="none">
+                <a:solidFill>
+                  <a:srgbClr val="000000"/>
+                </a:solidFill>
+                <a:latin typeface="Candara" panose="020E0502030303020204" pitchFamily="34" charset="0"/>
+                <a:ea typeface="Arial"/>
+                <a:cs typeface="Arial"/>
+                <a:sym typeface="Arial"/>
+              </a:defRPr>
+            </a:lvl5pPr>
+            <a:lvl6pPr marR="0" lvl="5" algn="l" rtl="0">
+              <a:lnSpc>
+                <a:spcPct val="100000"/>
+              </a:lnSpc>
+              <a:spcBef>
+                <a:spcPts val="0"/>
+              </a:spcBef>
+              <a:spcAft>
+                <a:spcPts val="0"/>
+              </a:spcAft>
+              <a:buClr>
+                <a:srgbClr val="000000"/>
+              </a:buClr>
+              <a:buSzPts val="2500"/>
+              <a:buFont typeface="Arial"/>
+              <a:buNone/>
+              <a:defRPr sz="2500" b="1" i="0" u="none" strike="noStrike" cap="none">
+                <a:solidFill>
+                  <a:srgbClr val="000000"/>
+                </a:solidFill>
+                <a:latin typeface="Candara" panose="020E0502030303020204" pitchFamily="34" charset="0"/>
+                <a:ea typeface="Arial"/>
+                <a:cs typeface="Arial"/>
+                <a:sym typeface="Arial"/>
+              </a:defRPr>
+            </a:lvl6pPr>
+            <a:lvl7pPr marR="0" lvl="6" algn="l" rtl="0">
+              <a:lnSpc>
+                <a:spcPct val="100000"/>
+              </a:lnSpc>
+              <a:spcBef>
+                <a:spcPts val="0"/>
+              </a:spcBef>
+              <a:spcAft>
+                <a:spcPts val="0"/>
+              </a:spcAft>
+              <a:buClr>
+                <a:srgbClr val="000000"/>
+              </a:buClr>
+              <a:buSzPts val="2500"/>
+              <a:buFont typeface="Arial"/>
+              <a:buNone/>
+              <a:defRPr sz="2500" b="1" i="0" u="none" strike="noStrike" cap="none">
+                <a:solidFill>
+                  <a:srgbClr val="000000"/>
+                </a:solidFill>
+                <a:latin typeface="Candara" panose="020E0502030303020204" pitchFamily="34" charset="0"/>
+                <a:ea typeface="Arial"/>
+                <a:cs typeface="Arial"/>
+                <a:sym typeface="Arial"/>
+              </a:defRPr>
+            </a:lvl7pPr>
+            <a:lvl8pPr marR="0" lvl="7" algn="l" rtl="0">
+              <a:lnSpc>
+                <a:spcPct val="100000"/>
+              </a:lnSpc>
+              <a:spcBef>
+                <a:spcPts val="0"/>
+              </a:spcBef>
+              <a:spcAft>
+                <a:spcPts val="0"/>
+              </a:spcAft>
+              <a:buClr>
+                <a:srgbClr val="000000"/>
+              </a:buClr>
+              <a:buSzPts val="2500"/>
+              <a:buFont typeface="Arial"/>
+              <a:buNone/>
+              <a:defRPr sz="2500" b="1" i="0" u="none" strike="noStrike" cap="none">
+                <a:solidFill>
+                  <a:srgbClr val="000000"/>
+                </a:solidFill>
+                <a:latin typeface="Candara" panose="020E0502030303020204" pitchFamily="34" charset="0"/>
+                <a:ea typeface="Arial"/>
+                <a:cs typeface="Arial"/>
+                <a:sym typeface="Arial"/>
+              </a:defRPr>
+            </a:lvl8pPr>
+            <a:lvl9pPr marR="0" lvl="8" algn="l" rtl="0">
+              <a:lnSpc>
+                <a:spcPct val="100000"/>
+              </a:lnSpc>
+              <a:spcBef>
+                <a:spcPts val="0"/>
+              </a:spcBef>
+              <a:spcAft>
+                <a:spcPts val="0"/>
+              </a:spcAft>
+              <a:buClr>
+                <a:srgbClr val="000000"/>
+              </a:buClr>
+              <a:buSzPts val="2500"/>
+              <a:buFont typeface="Arial"/>
+              <a:buNone/>
+              <a:defRPr sz="2500" b="1" i="0" u="none" strike="noStrike" cap="none">
+                <a:solidFill>
+                  <a:srgbClr val="000000"/>
+                </a:solidFill>
+                <a:latin typeface="Candara" panose="020E0502030303020204" pitchFamily="34" charset="0"/>
+                <a:ea typeface="Arial"/>
+                <a:cs typeface="Arial"/>
+                <a:sym typeface="Arial"/>
+              </a:defRPr>
+            </a:lvl9pPr>
+          </a:lstStyle>
+          <a:p>
+            <a:pPr algn="ctr"/>
+            <a:r>
+              <a:rPr lang="en-GB" sz="2800" dirty="0"/>
+              <a:t>Thank you!</a:t>
+            </a:r>
+          </a:p>
+        </p:txBody>
+      </p:sp>
+    </p:spTree>
+    <p:extLst>
+      <p:ext uri="{BB962C8B-B14F-4D97-AF65-F5344CB8AC3E}">
+        <p14:creationId xmlns:p14="http://schemas.microsoft.com/office/powerpoint/2010/main" val="3611274947"/>
+      </p:ext>
+    </p:extLst>
+  </p:cSld>
+  <p:clrMapOvr>
+    <a:masterClrMapping/>
+  </p:clrMapOvr>
+</p:sld>
+</file>
+
 <file path=ppt/slides/slide2.xml><?xml version="1.0" encoding="utf-8"?>
 <p:sld xmlns:a="http://schemas.openxmlformats.org/drawingml/2006/main" xmlns:r="http://schemas.openxmlformats.org/officeDocument/2006/relationships" xmlns:p="http://schemas.openxmlformats.org/presentationml/2006/main">
   <p:cSld>
@@ -7814,6 +8177,278 @@
         <p:spPr>
           <a:xfrm>
             <a:off x="192001" y="712807"/>
+            <a:ext cx="8742583" cy="1477328"/>
+          </a:xfrm>
+          <a:prstGeom prst="rect">
+            <a:avLst/>
+          </a:prstGeom>
+        </p:spPr>
+        <p:txBody>
+          <a:bodyPr wrap="square">
+            <a:spAutoFit/>
+          </a:bodyPr>
+          <a:lstStyle/>
+          <a:p>
+            <a:r>
+              <a:rPr lang="en-US" sz="1800" dirty="0">
+                <a:solidFill>
+                  <a:srgbClr val="990033"/>
+                </a:solidFill>
+                <a:latin typeface="+mn-lt"/>
+              </a:rPr>
+              <a:t>Please open the OASYS workflow:</a:t>
+            </a:r>
+          </a:p>
+          <a:p>
+            <a:endParaRPr lang="en-US" sz="1800" dirty="0">
+              <a:solidFill>
+                <a:srgbClr val="990033"/>
+              </a:solidFill>
+              <a:latin typeface="+mn-lt"/>
+            </a:endParaRPr>
+          </a:p>
+          <a:p>
+            <a:r>
+              <a:rPr lang="en-US" sz="1800" dirty="0">
+                <a:solidFill>
+                  <a:srgbClr val="4F81BD"/>
+                </a:solidFill>
+                <a:latin typeface="+mn-lt"/>
+              </a:rPr>
+              <a:t>eos26_hands-on_SHADOW4_scripting_part1.ows</a:t>
+            </a:r>
+          </a:p>
+          <a:p>
+            <a:endParaRPr lang="en-US" sz="1800" dirty="0">
+              <a:solidFill>
+                <a:srgbClr val="990033"/>
+              </a:solidFill>
+              <a:latin typeface="+mn-lt"/>
+            </a:endParaRPr>
+          </a:p>
+          <a:p>
+            <a:r>
+              <a:rPr lang="en-US" sz="1800" dirty="0">
+                <a:solidFill>
+                  <a:srgbClr val="990033"/>
+                </a:solidFill>
+                <a:latin typeface="+mn-lt"/>
+              </a:rPr>
+              <a:t>GitHub repository: </a:t>
+            </a:r>
+          </a:p>
+        </p:txBody>
+      </p:sp>
+      <p:pic>
+        <p:nvPicPr>
+          <p:cNvPr id="6" name="Picture 5">
+            <a:extLst>
+              <a:ext uri="{FF2B5EF4-FFF2-40B4-BE49-F238E27FC236}">
+                <a16:creationId xmlns:a16="http://schemas.microsoft.com/office/drawing/2014/main" id="{5CE17F29-E31F-459E-9981-4617BD3CFE9C}"/>
+              </a:ext>
+            </a:extLst>
+          </p:cNvPr>
+          <p:cNvPicPr>
+            <a:picLocks noChangeAspect="1"/>
+          </p:cNvPicPr>
+          <p:nvPr/>
+        </p:nvPicPr>
+        <p:blipFill>
+          <a:blip r:embed="rId2"/>
+          <a:stretch>
+            <a:fillRect/>
+          </a:stretch>
+        </p:blipFill>
+        <p:spPr>
+          <a:xfrm>
+            <a:off x="348905" y="2469460"/>
+            <a:ext cx="8048625" cy="933450"/>
+          </a:xfrm>
+          <a:prstGeom prst="rect">
+            <a:avLst/>
+          </a:prstGeom>
+        </p:spPr>
+      </p:pic>
+      <p:sp>
+        <p:nvSpPr>
+          <p:cNvPr id="8" name="Rectangle: Rounded Corners 7">
+            <a:extLst>
+              <a:ext uri="{FF2B5EF4-FFF2-40B4-BE49-F238E27FC236}">
+                <a16:creationId xmlns:a16="http://schemas.microsoft.com/office/drawing/2014/main" id="{557D3E0F-3332-41F8-9237-67F9B0717E15}"/>
+              </a:ext>
+            </a:extLst>
+          </p:cNvPr>
+          <p:cNvSpPr/>
+          <p:nvPr/>
+        </p:nvSpPr>
+        <p:spPr>
+          <a:xfrm>
+            <a:off x="3299791" y="2670313"/>
+            <a:ext cx="2895600" cy="284922"/>
+          </a:xfrm>
+          <a:prstGeom prst="roundRect">
+            <a:avLst/>
+          </a:prstGeom>
+          <a:noFill/>
+          <a:ln>
+            <a:solidFill>
+              <a:srgbClr val="B3E5FC"/>
+            </a:solidFill>
+          </a:ln>
+        </p:spPr>
+        <p:style>
+          <a:lnRef idx="2">
+            <a:schemeClr val="accent1">
+              <a:shade val="50000"/>
+            </a:schemeClr>
+          </a:lnRef>
+          <a:fillRef idx="1">
+            <a:schemeClr val="accent1"/>
+          </a:fillRef>
+          <a:effectRef idx="0">
+            <a:schemeClr val="accent1"/>
+          </a:effectRef>
+          <a:fontRef idx="minor">
+            <a:schemeClr val="lt1"/>
+          </a:fontRef>
+        </p:style>
+        <p:txBody>
+          <a:bodyPr rtlCol="0" anchor="ctr"/>
+          <a:lstStyle/>
+          <a:p>
+            <a:pPr algn="ctr"/>
+            <a:endParaRPr lang="en-US"/>
+          </a:p>
+        </p:txBody>
+      </p:sp>
+    </p:spTree>
+    <p:extLst>
+      <p:ext uri="{BB962C8B-B14F-4D97-AF65-F5344CB8AC3E}">
+        <p14:creationId xmlns:p14="http://schemas.microsoft.com/office/powerpoint/2010/main" val="909356498"/>
+      </p:ext>
+    </p:extLst>
+  </p:cSld>
+  <p:clrMapOvr>
+    <a:masterClrMapping/>
+  </p:clrMapOvr>
+</p:sld>
+</file>
+
+<file path=ppt/slides/slide4.xml><?xml version="1.0" encoding="utf-8"?>
+<p:sld xmlns:a="http://schemas.openxmlformats.org/drawingml/2006/main" xmlns:r="http://schemas.openxmlformats.org/officeDocument/2006/relationships" xmlns:p="http://schemas.openxmlformats.org/presentationml/2006/main">
+  <p:cSld>
+    <p:spTree>
+      <p:nvGrpSpPr>
+        <p:cNvPr id="1" name="">
+          <a:extLst>
+            <a:ext uri="{FF2B5EF4-FFF2-40B4-BE49-F238E27FC236}">
+              <a16:creationId xmlns:a16="http://schemas.microsoft.com/office/drawing/2014/main" id="{7A8F851E-D277-932A-4633-D8CD0698C828}"/>
+            </a:ext>
+          </a:extLst>
+        </p:cNvPr>
+        <p:cNvGrpSpPr/>
+        <p:nvPr/>
+      </p:nvGrpSpPr>
+      <p:grpSpPr>
+        <a:xfrm>
+          <a:off x="0" y="0"/>
+          <a:ext cx="0" cy="0"/>
+          <a:chOff x="0" y="0"/>
+          <a:chExt cx="0" cy="0"/>
+        </a:xfrm>
+      </p:grpSpPr>
+      <p:sp>
+        <p:nvSpPr>
+          <p:cNvPr id="2" name="Title 1">
+            <a:extLst>
+              <a:ext uri="{FF2B5EF4-FFF2-40B4-BE49-F238E27FC236}">
+                <a16:creationId xmlns:a16="http://schemas.microsoft.com/office/drawing/2014/main" id="{4D38857E-B458-134F-4422-9DC976518EE8}"/>
+              </a:ext>
+            </a:extLst>
+          </p:cNvPr>
+          <p:cNvSpPr>
+            <a:spLocks noGrp="1"/>
+          </p:cNvSpPr>
+          <p:nvPr>
+            <p:ph type="title"/>
+          </p:nvPr>
+        </p:nvSpPr>
+        <p:spPr>
+          <a:xfrm>
+            <a:off x="57675" y="62425"/>
+            <a:ext cx="9039600" cy="553968"/>
+          </a:xfrm>
+        </p:spPr>
+        <p:txBody>
+          <a:bodyPr/>
+          <a:lstStyle/>
+          <a:p>
+            <a:pPr algn="ctr" defTabSz="822960">
+              <a:buClrTx/>
+            </a:pPr>
+            <a:r>
+              <a:rPr lang="en-US" kern="1200" dirty="0">
+                <a:ea typeface="+mn-ea"/>
+                <a:cs typeface="+mn-cs"/>
+              </a:rPr>
+              <a:t>Python scripts on OASYS GUI - SHADOW4</a:t>
+            </a:r>
+          </a:p>
+        </p:txBody>
+      </p:sp>
+      <p:sp>
+        <p:nvSpPr>
+          <p:cNvPr id="4" name="Slide Number Placeholder 3">
+            <a:extLst>
+              <a:ext uri="{FF2B5EF4-FFF2-40B4-BE49-F238E27FC236}">
+                <a16:creationId xmlns:a16="http://schemas.microsoft.com/office/drawing/2014/main" id="{D95C8397-D63C-7691-BB87-3EFDB9376A2A}"/>
+              </a:ext>
+            </a:extLst>
+          </p:cNvPr>
+          <p:cNvSpPr>
+            <a:spLocks noGrp="1"/>
+          </p:cNvSpPr>
+          <p:nvPr>
+            <p:ph type="sldNum" idx="12"/>
+          </p:nvPr>
+        </p:nvSpPr>
+        <p:spPr/>
+        <p:txBody>
+          <a:bodyPr/>
+          <a:lstStyle/>
+          <a:p>
+            <a:pPr marL="0" lvl="0" indent="0" algn="r" rtl="0">
+              <a:spcBef>
+                <a:spcPts val="0"/>
+              </a:spcBef>
+              <a:spcAft>
+                <a:spcPts val="0"/>
+              </a:spcAft>
+              <a:buNone/>
+            </a:pPr>
+            <a:fld id="{00000000-1234-1234-1234-123412341234}" type="slidenum">
+              <a:rPr lang="en-GB" noProof="0" smtClean="0"/>
+              <a:t>4</a:t>
+            </a:fld>
+            <a:endParaRPr lang="en-GB" noProof="0" dirty="0"/>
+          </a:p>
+        </p:txBody>
+      </p:sp>
+      <p:sp>
+        <p:nvSpPr>
+          <p:cNvPr id="42" name="Rectangle 41">
+            <a:extLst>
+              <a:ext uri="{FF2B5EF4-FFF2-40B4-BE49-F238E27FC236}">
+                <a16:creationId xmlns:a16="http://schemas.microsoft.com/office/drawing/2014/main" id="{27009A60-18FA-43EE-9E6E-57CC3305989B}"/>
+              </a:ext>
+            </a:extLst>
+          </p:cNvPr>
+          <p:cNvSpPr/>
+          <p:nvPr/>
+        </p:nvSpPr>
+        <p:spPr>
+          <a:xfrm>
+            <a:off x="192001" y="712807"/>
             <a:ext cx="8742583" cy="646331"/>
           </a:xfrm>
           <a:prstGeom prst="rect">
@@ -8095,7 +8730,7 @@
 </p:sld>
 </file>
 
-<file path=ppt/slides/slide4.xml><?xml version="1.0" encoding="utf-8"?>
+<file path=ppt/slides/slide5.xml><?xml version="1.0" encoding="utf-8"?>
 <p:sld xmlns:a="http://schemas.openxmlformats.org/drawingml/2006/main" xmlns:r="http://schemas.openxmlformats.org/officeDocument/2006/relationships" xmlns:p="http://schemas.openxmlformats.org/presentationml/2006/main">
   <p:cSld>
     <p:spTree>
@@ -8189,7 +8824,7 @@
             </a:pPr>
             <a:fld id="{00000000-1234-1234-1234-123412341234}" type="slidenum">
               <a:rPr lang="en-GB" noProof="0" smtClean="0"/>
-              <a:t>4</a:t>
+              <a:t>5</a:t>
             </a:fld>
             <a:endParaRPr lang="en-GB" noProof="0" dirty="0"/>
           </a:p>
@@ -10889,7 +11524,7 @@
 </p:sld>
 </file>
 
-<file path=ppt/slides/slide5.xml><?xml version="1.0" encoding="utf-8"?>
+<file path=ppt/slides/slide6.xml><?xml version="1.0" encoding="utf-8"?>
 <p:sld xmlns:a="http://schemas.openxmlformats.org/drawingml/2006/main" xmlns:r="http://schemas.openxmlformats.org/officeDocument/2006/relationships" xmlns:p="http://schemas.openxmlformats.org/presentationml/2006/main">
   <p:cSld>
     <p:spTree>
@@ -10983,7 +11618,7 @@
             </a:pPr>
             <a:fld id="{00000000-1234-1234-1234-123412341234}" type="slidenum">
               <a:rPr lang="en-GB" noProof="0" smtClean="0"/>
-              <a:t>5</a:t>
+              <a:t>6</a:t>
             </a:fld>
             <a:endParaRPr lang="en-GB" noProof="0" dirty="0"/>
           </a:p>
@@ -11005,14 +11640,13 @@
         </p:nvPicPr>
         <p:blipFill>
           <a:blip r:embed="rId2"/>
-          <a:stretch>
-            <a:fillRect/>
-          </a:stretch>
+          <a:srcRect/>
+          <a:stretch/>
         </p:blipFill>
         <p:spPr>
           <a:xfrm>
-            <a:off x="564046" y="1064937"/>
-            <a:ext cx="3186320" cy="2446135"/>
+            <a:off x="639119" y="1502259"/>
+            <a:ext cx="2877147" cy="2446135"/>
           </a:xfrm>
           <a:prstGeom prst="rect">
             <a:avLst/>
@@ -11227,7 +11861,279 @@
 </p:sld>
 </file>
 
-<file path=ppt/slides/slide6.xml><?xml version="1.0" encoding="utf-8"?>
+<file path=ppt/slides/slide7.xml><?xml version="1.0" encoding="utf-8"?>
+<p:sld xmlns:a="http://schemas.openxmlformats.org/drawingml/2006/main" xmlns:r="http://schemas.openxmlformats.org/officeDocument/2006/relationships" xmlns:p="http://schemas.openxmlformats.org/presentationml/2006/main">
+  <p:cSld>
+    <p:spTree>
+      <p:nvGrpSpPr>
+        <p:cNvPr id="1" name="">
+          <a:extLst>
+            <a:ext uri="{FF2B5EF4-FFF2-40B4-BE49-F238E27FC236}">
+              <a16:creationId xmlns:a16="http://schemas.microsoft.com/office/drawing/2014/main" id="{7A8F851E-D277-932A-4633-D8CD0698C828}"/>
+            </a:ext>
+          </a:extLst>
+        </p:cNvPr>
+        <p:cNvGrpSpPr/>
+        <p:nvPr/>
+      </p:nvGrpSpPr>
+      <p:grpSpPr>
+        <a:xfrm>
+          <a:off x="0" y="0"/>
+          <a:ext cx="0" cy="0"/>
+          <a:chOff x="0" y="0"/>
+          <a:chExt cx="0" cy="0"/>
+        </a:xfrm>
+      </p:grpSpPr>
+      <p:sp>
+        <p:nvSpPr>
+          <p:cNvPr id="2" name="Title 1">
+            <a:extLst>
+              <a:ext uri="{FF2B5EF4-FFF2-40B4-BE49-F238E27FC236}">
+                <a16:creationId xmlns:a16="http://schemas.microsoft.com/office/drawing/2014/main" id="{4D38857E-B458-134F-4422-9DC976518EE8}"/>
+              </a:ext>
+            </a:extLst>
+          </p:cNvPr>
+          <p:cNvSpPr>
+            <a:spLocks noGrp="1"/>
+          </p:cNvSpPr>
+          <p:nvPr>
+            <p:ph type="title"/>
+          </p:nvPr>
+        </p:nvSpPr>
+        <p:spPr>
+          <a:xfrm>
+            <a:off x="57675" y="62425"/>
+            <a:ext cx="9039600" cy="553968"/>
+          </a:xfrm>
+        </p:spPr>
+        <p:txBody>
+          <a:bodyPr/>
+          <a:lstStyle/>
+          <a:p>
+            <a:pPr algn="ctr" defTabSz="822960">
+              <a:buClrTx/>
+            </a:pPr>
+            <a:r>
+              <a:rPr lang="en-US" kern="1200" dirty="0">
+                <a:ea typeface="+mn-ea"/>
+                <a:cs typeface="+mn-cs"/>
+              </a:rPr>
+              <a:t>Python scripts on OASYS GUI - SHADOW4</a:t>
+            </a:r>
+          </a:p>
+        </p:txBody>
+      </p:sp>
+      <p:sp>
+        <p:nvSpPr>
+          <p:cNvPr id="4" name="Slide Number Placeholder 3">
+            <a:extLst>
+              <a:ext uri="{FF2B5EF4-FFF2-40B4-BE49-F238E27FC236}">
+                <a16:creationId xmlns:a16="http://schemas.microsoft.com/office/drawing/2014/main" id="{D95C8397-D63C-7691-BB87-3EFDB9376A2A}"/>
+              </a:ext>
+            </a:extLst>
+          </p:cNvPr>
+          <p:cNvSpPr>
+            <a:spLocks noGrp="1"/>
+          </p:cNvSpPr>
+          <p:nvPr>
+            <p:ph type="sldNum" idx="12"/>
+          </p:nvPr>
+        </p:nvSpPr>
+        <p:spPr/>
+        <p:txBody>
+          <a:bodyPr/>
+          <a:lstStyle/>
+          <a:p>
+            <a:pPr marL="0" lvl="0" indent="0" algn="r" rtl="0">
+              <a:spcBef>
+                <a:spcPts val="0"/>
+              </a:spcBef>
+              <a:spcAft>
+                <a:spcPts val="0"/>
+              </a:spcAft>
+              <a:buNone/>
+            </a:pPr>
+            <a:fld id="{00000000-1234-1234-1234-123412341234}" type="slidenum">
+              <a:rPr lang="en-GB" noProof="0" smtClean="0"/>
+              <a:t>7</a:t>
+            </a:fld>
+            <a:endParaRPr lang="en-GB" noProof="0" dirty="0"/>
+          </a:p>
+        </p:txBody>
+      </p:sp>
+      <p:sp>
+        <p:nvSpPr>
+          <p:cNvPr id="42" name="Rectangle 41">
+            <a:extLst>
+              <a:ext uri="{FF2B5EF4-FFF2-40B4-BE49-F238E27FC236}">
+                <a16:creationId xmlns:a16="http://schemas.microsoft.com/office/drawing/2014/main" id="{27009A60-18FA-43EE-9E6E-57CC3305989B}"/>
+              </a:ext>
+            </a:extLst>
+          </p:cNvPr>
+          <p:cNvSpPr/>
+          <p:nvPr/>
+        </p:nvSpPr>
+        <p:spPr>
+          <a:xfrm>
+            <a:off x="192001" y="712807"/>
+            <a:ext cx="8742583" cy="1477328"/>
+          </a:xfrm>
+          <a:prstGeom prst="rect">
+            <a:avLst/>
+          </a:prstGeom>
+        </p:spPr>
+        <p:txBody>
+          <a:bodyPr wrap="square">
+            <a:spAutoFit/>
+          </a:bodyPr>
+          <a:lstStyle/>
+          <a:p>
+            <a:r>
+              <a:rPr lang="en-US" sz="1800" dirty="0">
+                <a:solidFill>
+                  <a:srgbClr val="990033"/>
+                </a:solidFill>
+                <a:latin typeface="+mn-lt"/>
+              </a:rPr>
+              <a:t>Please open the OASYS workflow:</a:t>
+            </a:r>
+          </a:p>
+          <a:p>
+            <a:endParaRPr lang="en-US" sz="1800" dirty="0">
+              <a:solidFill>
+                <a:srgbClr val="990033"/>
+              </a:solidFill>
+              <a:latin typeface="+mn-lt"/>
+            </a:endParaRPr>
+          </a:p>
+          <a:p>
+            <a:r>
+              <a:rPr lang="en-US" sz="1800" dirty="0">
+                <a:solidFill>
+                  <a:srgbClr val="4F81BD"/>
+                </a:solidFill>
+                <a:latin typeface="+mn-lt"/>
+              </a:rPr>
+              <a:t>eos26_hands-on_SHADOW4_scripting_part2_misalignment.ows</a:t>
+            </a:r>
+          </a:p>
+          <a:p>
+            <a:endParaRPr lang="en-US" sz="1800" dirty="0">
+              <a:solidFill>
+                <a:srgbClr val="990033"/>
+              </a:solidFill>
+              <a:latin typeface="+mn-lt"/>
+            </a:endParaRPr>
+          </a:p>
+          <a:p>
+            <a:r>
+              <a:rPr lang="en-US" sz="1800" dirty="0">
+                <a:solidFill>
+                  <a:srgbClr val="990033"/>
+                </a:solidFill>
+                <a:latin typeface="+mn-lt"/>
+              </a:rPr>
+              <a:t>GitHub repository: </a:t>
+            </a:r>
+          </a:p>
+        </p:txBody>
+      </p:sp>
+      <p:pic>
+        <p:nvPicPr>
+          <p:cNvPr id="6" name="Picture 5">
+            <a:extLst>
+              <a:ext uri="{FF2B5EF4-FFF2-40B4-BE49-F238E27FC236}">
+                <a16:creationId xmlns:a16="http://schemas.microsoft.com/office/drawing/2014/main" id="{5CE17F29-E31F-459E-9981-4617BD3CFE9C}"/>
+              </a:ext>
+            </a:extLst>
+          </p:cNvPr>
+          <p:cNvPicPr>
+            <a:picLocks noChangeAspect="1"/>
+          </p:cNvPicPr>
+          <p:nvPr/>
+        </p:nvPicPr>
+        <p:blipFill>
+          <a:blip r:embed="rId2"/>
+          <a:stretch>
+            <a:fillRect/>
+          </a:stretch>
+        </p:blipFill>
+        <p:spPr>
+          <a:xfrm>
+            <a:off x="368783" y="2244174"/>
+            <a:ext cx="8048625" cy="933450"/>
+          </a:xfrm>
+          <a:prstGeom prst="rect">
+            <a:avLst/>
+          </a:prstGeom>
+        </p:spPr>
+      </p:pic>
+      <p:sp>
+        <p:nvSpPr>
+          <p:cNvPr id="8" name="Rectangle: Rounded Corners 7">
+            <a:extLst>
+              <a:ext uri="{FF2B5EF4-FFF2-40B4-BE49-F238E27FC236}">
+                <a16:creationId xmlns:a16="http://schemas.microsoft.com/office/drawing/2014/main" id="{557D3E0F-3332-41F8-9237-67F9B0717E15}"/>
+              </a:ext>
+            </a:extLst>
+          </p:cNvPr>
+          <p:cNvSpPr/>
+          <p:nvPr/>
+        </p:nvSpPr>
+        <p:spPr>
+          <a:xfrm>
+            <a:off x="3299791" y="2670313"/>
+            <a:ext cx="3452192" cy="284922"/>
+          </a:xfrm>
+          <a:prstGeom prst="roundRect">
+            <a:avLst/>
+          </a:prstGeom>
+          <a:noFill/>
+          <a:ln>
+            <a:solidFill>
+              <a:srgbClr val="B3E5FC"/>
+            </a:solidFill>
+          </a:ln>
+        </p:spPr>
+        <p:style>
+          <a:lnRef idx="2">
+            <a:schemeClr val="accent1">
+              <a:shade val="50000"/>
+            </a:schemeClr>
+          </a:lnRef>
+          <a:fillRef idx="1">
+            <a:schemeClr val="accent1"/>
+          </a:fillRef>
+          <a:effectRef idx="0">
+            <a:schemeClr val="accent1"/>
+          </a:effectRef>
+          <a:fontRef idx="minor">
+            <a:schemeClr val="lt1"/>
+          </a:fontRef>
+        </p:style>
+        <p:txBody>
+          <a:bodyPr rtlCol="0" anchor="ctr"/>
+          <a:lstStyle/>
+          <a:p>
+            <a:pPr algn="ctr"/>
+            <a:endParaRPr lang="en-US"/>
+          </a:p>
+        </p:txBody>
+      </p:sp>
+    </p:spTree>
+    <p:extLst>
+      <p:ext uri="{BB962C8B-B14F-4D97-AF65-F5344CB8AC3E}">
+        <p14:creationId xmlns:p14="http://schemas.microsoft.com/office/powerpoint/2010/main" val="1116600654"/>
+      </p:ext>
+    </p:extLst>
+  </p:cSld>
+  <p:clrMapOvr>
+    <a:masterClrMapping/>
+  </p:clrMapOvr>
+</p:sld>
+</file>
+
+<file path=ppt/slides/slide8.xml><?xml version="1.0" encoding="utf-8"?>
 <p:sld xmlns:a="http://schemas.openxmlformats.org/drawingml/2006/main" xmlns:r="http://schemas.openxmlformats.org/officeDocument/2006/relationships" xmlns:p="http://schemas.openxmlformats.org/presentationml/2006/main">
   <p:cSld>
     <p:spTree>
@@ -11366,7 +12272,7 @@
             </a:pPr>
             <a:fld id="{00000000-1234-1234-1234-123412341234}" type="slidenum">
               <a:rPr lang="en-GB" noProof="0" smtClean="0"/>
-              <a:t>6</a:t>
+              <a:t>8</a:t>
             </a:fld>
             <a:endParaRPr lang="en-GB" noProof="0" dirty="0"/>
           </a:p>
@@ -13880,7 +14786,7 @@
 </p:sld>
 </file>
 
-<file path=ppt/slides/slide7.xml><?xml version="1.0" encoding="utf-8"?>
+<file path=ppt/slides/slide9.xml><?xml version="1.0" encoding="utf-8"?>
 <p:sld xmlns:a="http://schemas.openxmlformats.org/drawingml/2006/main" xmlns:r="http://schemas.openxmlformats.org/officeDocument/2006/relationships" xmlns:p="http://schemas.openxmlformats.org/presentationml/2006/main">
   <p:cSld>
     <p:spTree>
@@ -14004,7 +14910,7 @@
             </a:pPr>
             <a:fld id="{00000000-1234-1234-1234-123412341234}" type="slidenum">
               <a:rPr lang="en-GB" noProof="0" smtClean="0"/>
-              <a:t>7</a:t>
+              <a:t>9</a:t>
             </a:fld>
             <a:endParaRPr lang="en-GB" noProof="0" dirty="0"/>
           </a:p>
@@ -14157,367 +15063,6 @@
     <p:extLst>
       <p:ext uri="{BB962C8B-B14F-4D97-AF65-F5344CB8AC3E}">
         <p14:creationId xmlns:p14="http://schemas.microsoft.com/office/powerpoint/2010/main" val="1743596514"/>
-      </p:ext>
-    </p:extLst>
-  </p:cSld>
-  <p:clrMapOvr>
-    <a:masterClrMapping/>
-  </p:clrMapOvr>
-</p:sld>
-</file>
-
-<file path=ppt/slides/slide8.xml><?xml version="1.0" encoding="utf-8"?>
-<p:sld xmlns:a="http://schemas.openxmlformats.org/drawingml/2006/main" xmlns:r="http://schemas.openxmlformats.org/officeDocument/2006/relationships" xmlns:p="http://schemas.openxmlformats.org/presentationml/2006/main">
-  <p:cSld>
-    <p:spTree>
-      <p:nvGrpSpPr>
-        <p:cNvPr id="1" name="">
-          <a:extLst>
-            <a:ext uri="{FF2B5EF4-FFF2-40B4-BE49-F238E27FC236}">
-              <a16:creationId xmlns:a16="http://schemas.microsoft.com/office/drawing/2014/main" id="{7A8F851E-D277-932A-4633-D8CD0698C828}"/>
-            </a:ext>
-          </a:extLst>
-        </p:cNvPr>
-        <p:cNvGrpSpPr/>
-        <p:nvPr/>
-      </p:nvGrpSpPr>
-      <p:grpSpPr>
-        <a:xfrm>
-          <a:off x="0" y="0"/>
-          <a:ext cx="0" cy="0"/>
-          <a:chOff x="0" y="0"/>
-          <a:chExt cx="0" cy="0"/>
-        </a:xfrm>
-      </p:grpSpPr>
-      <p:sp>
-        <p:nvSpPr>
-          <p:cNvPr id="4" name="Slide Number Placeholder 3">
-            <a:extLst>
-              <a:ext uri="{FF2B5EF4-FFF2-40B4-BE49-F238E27FC236}">
-                <a16:creationId xmlns:a16="http://schemas.microsoft.com/office/drawing/2014/main" id="{D95C8397-D63C-7691-BB87-3EFDB9376A2A}"/>
-              </a:ext>
-            </a:extLst>
-          </p:cNvPr>
-          <p:cNvSpPr>
-            <a:spLocks noGrp="1"/>
-          </p:cNvSpPr>
-          <p:nvPr>
-            <p:ph type="sldNum" idx="12"/>
-          </p:nvPr>
-        </p:nvSpPr>
-        <p:spPr/>
-        <p:txBody>
-          <a:bodyPr/>
-          <a:lstStyle/>
-          <a:p>
-            <a:pPr marL="0" lvl="0" indent="0" algn="r" rtl="0">
-              <a:spcBef>
-                <a:spcPts val="0"/>
-              </a:spcBef>
-              <a:spcAft>
-                <a:spcPts val="0"/>
-              </a:spcAft>
-              <a:buNone/>
-            </a:pPr>
-            <a:fld id="{00000000-1234-1234-1234-123412341234}" type="slidenum">
-              <a:rPr lang="en-GB" noProof="0" smtClean="0"/>
-              <a:t>8</a:t>
-            </a:fld>
-            <a:endParaRPr lang="en-GB" noProof="0" dirty="0"/>
-          </a:p>
-        </p:txBody>
-      </p:sp>
-      <p:sp>
-        <p:nvSpPr>
-          <p:cNvPr id="11" name="Title 1">
-            <a:extLst>
-              <a:ext uri="{FF2B5EF4-FFF2-40B4-BE49-F238E27FC236}">
-                <a16:creationId xmlns:a16="http://schemas.microsoft.com/office/drawing/2014/main" id="{95165B9C-6AB7-40E6-87AB-3AEB8367E436}"/>
-              </a:ext>
-            </a:extLst>
-          </p:cNvPr>
-          <p:cNvSpPr txBox="1">
-            <a:spLocks/>
-          </p:cNvSpPr>
-          <p:nvPr/>
-        </p:nvSpPr>
-        <p:spPr>
-          <a:xfrm>
-            <a:off x="1920124" y="2435486"/>
-            <a:ext cx="4787499" cy="612930"/>
-          </a:xfrm>
-          <a:prstGeom prst="rect">
-            <a:avLst/>
-          </a:prstGeom>
-          <a:noFill/>
-          <a:ln>
-            <a:noFill/>
-          </a:ln>
-        </p:spPr>
-        <p:txBody>
-          <a:bodyPr spcFirstLastPara="1" wrap="square" lIns="91425" tIns="91425" rIns="91425" bIns="91425" anchor="t" anchorCtr="0">
-            <a:spAutoFit/>
-          </a:bodyPr>
-          <a:lstStyle>
-            <a:defPPr marR="0" lvl="0" algn="l" rtl="0">
-              <a:lnSpc>
-                <a:spcPct val="100000"/>
-              </a:lnSpc>
-              <a:spcBef>
-                <a:spcPts val="0"/>
-              </a:spcBef>
-              <a:spcAft>
-                <a:spcPts val="0"/>
-              </a:spcAft>
-            </a:defPPr>
-            <a:lvl1pPr marR="0" lvl="0" algn="l" rtl="0">
-              <a:lnSpc>
-                <a:spcPct val="100000"/>
-              </a:lnSpc>
-              <a:spcBef>
-                <a:spcPts val="0"/>
-              </a:spcBef>
-              <a:spcAft>
-                <a:spcPts val="0"/>
-              </a:spcAft>
-              <a:buClr>
-                <a:srgbClr val="000000"/>
-              </a:buClr>
-              <a:buSzPts val="2500"/>
-              <a:buFont typeface="Arial"/>
-              <a:buNone/>
-              <a:defRPr sz="2400" b="1" i="0" u="none" strike="noStrike" cap="none">
-                <a:solidFill>
-                  <a:srgbClr val="254061"/>
-                </a:solidFill>
-                <a:latin typeface="Candara" panose="020E0502030303020204" pitchFamily="34" charset="0"/>
-                <a:ea typeface="Arial"/>
-                <a:cs typeface="Arial"/>
-                <a:sym typeface="Arial"/>
-              </a:defRPr>
-            </a:lvl1pPr>
-            <a:lvl2pPr marR="0" lvl="1" algn="l" rtl="0">
-              <a:lnSpc>
-                <a:spcPct val="100000"/>
-              </a:lnSpc>
-              <a:spcBef>
-                <a:spcPts val="0"/>
-              </a:spcBef>
-              <a:spcAft>
-                <a:spcPts val="0"/>
-              </a:spcAft>
-              <a:buClr>
-                <a:srgbClr val="000000"/>
-              </a:buClr>
-              <a:buSzPts val="2500"/>
-              <a:buFont typeface="Arial"/>
-              <a:buNone/>
-              <a:defRPr sz="2500" b="1" i="0" u="none" strike="noStrike" cap="none">
-                <a:solidFill>
-                  <a:srgbClr val="000000"/>
-                </a:solidFill>
-                <a:latin typeface="Candara" panose="020E0502030303020204" pitchFamily="34" charset="0"/>
-                <a:ea typeface="Arial"/>
-                <a:cs typeface="Arial"/>
-                <a:sym typeface="Arial"/>
-              </a:defRPr>
-            </a:lvl2pPr>
-            <a:lvl3pPr marR="0" lvl="2" algn="l" rtl="0">
-              <a:lnSpc>
-                <a:spcPct val="100000"/>
-              </a:lnSpc>
-              <a:spcBef>
-                <a:spcPts val="0"/>
-              </a:spcBef>
-              <a:spcAft>
-                <a:spcPts val="0"/>
-              </a:spcAft>
-              <a:buClr>
-                <a:srgbClr val="000000"/>
-              </a:buClr>
-              <a:buSzPts val="2500"/>
-              <a:buFont typeface="Arial"/>
-              <a:buNone/>
-              <a:defRPr sz="2500" b="1" i="0" u="none" strike="noStrike" cap="none">
-                <a:solidFill>
-                  <a:srgbClr val="000000"/>
-                </a:solidFill>
-                <a:latin typeface="Candara" panose="020E0502030303020204" pitchFamily="34" charset="0"/>
-                <a:ea typeface="Arial"/>
-                <a:cs typeface="Arial"/>
-                <a:sym typeface="Arial"/>
-              </a:defRPr>
-            </a:lvl3pPr>
-            <a:lvl4pPr marR="0" lvl="3" algn="l" rtl="0">
-              <a:lnSpc>
-                <a:spcPct val="100000"/>
-              </a:lnSpc>
-              <a:spcBef>
-                <a:spcPts val="0"/>
-              </a:spcBef>
-              <a:spcAft>
-                <a:spcPts val="0"/>
-              </a:spcAft>
-              <a:buClr>
-                <a:srgbClr val="000000"/>
-              </a:buClr>
-              <a:buSzPts val="2500"/>
-              <a:buFont typeface="Arial"/>
-              <a:buNone/>
-              <a:defRPr sz="2500" b="1" i="0" u="none" strike="noStrike" cap="none">
-                <a:solidFill>
-                  <a:srgbClr val="000000"/>
-                </a:solidFill>
-                <a:latin typeface="Candara" panose="020E0502030303020204" pitchFamily="34" charset="0"/>
-                <a:ea typeface="Arial"/>
-                <a:cs typeface="Arial"/>
-                <a:sym typeface="Arial"/>
-              </a:defRPr>
-            </a:lvl4pPr>
-            <a:lvl5pPr marR="0" lvl="4" algn="l" rtl="0">
-              <a:lnSpc>
-                <a:spcPct val="100000"/>
-              </a:lnSpc>
-              <a:spcBef>
-                <a:spcPts val="0"/>
-              </a:spcBef>
-              <a:spcAft>
-                <a:spcPts val="0"/>
-              </a:spcAft>
-              <a:buClr>
-                <a:srgbClr val="000000"/>
-              </a:buClr>
-              <a:buSzPts val="2500"/>
-              <a:buFont typeface="Arial"/>
-              <a:buNone/>
-              <a:defRPr sz="2500" b="1" i="0" u="none" strike="noStrike" cap="none">
-                <a:solidFill>
-                  <a:srgbClr val="000000"/>
-                </a:solidFill>
-                <a:latin typeface="Candara" panose="020E0502030303020204" pitchFamily="34" charset="0"/>
-                <a:ea typeface="Arial"/>
-                <a:cs typeface="Arial"/>
-                <a:sym typeface="Arial"/>
-              </a:defRPr>
-            </a:lvl5pPr>
-            <a:lvl6pPr marR="0" lvl="5" algn="l" rtl="0">
-              <a:lnSpc>
-                <a:spcPct val="100000"/>
-              </a:lnSpc>
-              <a:spcBef>
-                <a:spcPts val="0"/>
-              </a:spcBef>
-              <a:spcAft>
-                <a:spcPts val="0"/>
-              </a:spcAft>
-              <a:buClr>
-                <a:srgbClr val="000000"/>
-              </a:buClr>
-              <a:buSzPts val="2500"/>
-              <a:buFont typeface="Arial"/>
-              <a:buNone/>
-              <a:defRPr sz="2500" b="1" i="0" u="none" strike="noStrike" cap="none">
-                <a:solidFill>
-                  <a:srgbClr val="000000"/>
-                </a:solidFill>
-                <a:latin typeface="Candara" panose="020E0502030303020204" pitchFamily="34" charset="0"/>
-                <a:ea typeface="Arial"/>
-                <a:cs typeface="Arial"/>
-                <a:sym typeface="Arial"/>
-              </a:defRPr>
-            </a:lvl6pPr>
-            <a:lvl7pPr marR="0" lvl="6" algn="l" rtl="0">
-              <a:lnSpc>
-                <a:spcPct val="100000"/>
-              </a:lnSpc>
-              <a:spcBef>
-                <a:spcPts val="0"/>
-              </a:spcBef>
-              <a:spcAft>
-                <a:spcPts val="0"/>
-              </a:spcAft>
-              <a:buClr>
-                <a:srgbClr val="000000"/>
-              </a:buClr>
-              <a:buSzPts val="2500"/>
-              <a:buFont typeface="Arial"/>
-              <a:buNone/>
-              <a:defRPr sz="2500" b="1" i="0" u="none" strike="noStrike" cap="none">
-                <a:solidFill>
-                  <a:srgbClr val="000000"/>
-                </a:solidFill>
-                <a:latin typeface="Candara" panose="020E0502030303020204" pitchFamily="34" charset="0"/>
-                <a:ea typeface="Arial"/>
-                <a:cs typeface="Arial"/>
-                <a:sym typeface="Arial"/>
-              </a:defRPr>
-            </a:lvl7pPr>
-            <a:lvl8pPr marR="0" lvl="7" algn="l" rtl="0">
-              <a:lnSpc>
-                <a:spcPct val="100000"/>
-              </a:lnSpc>
-              <a:spcBef>
-                <a:spcPts val="0"/>
-              </a:spcBef>
-              <a:spcAft>
-                <a:spcPts val="0"/>
-              </a:spcAft>
-              <a:buClr>
-                <a:srgbClr val="000000"/>
-              </a:buClr>
-              <a:buSzPts val="2500"/>
-              <a:buFont typeface="Arial"/>
-              <a:buNone/>
-              <a:defRPr sz="2500" b="1" i="0" u="none" strike="noStrike" cap="none">
-                <a:solidFill>
-                  <a:srgbClr val="000000"/>
-                </a:solidFill>
-                <a:latin typeface="Candara" panose="020E0502030303020204" pitchFamily="34" charset="0"/>
-                <a:ea typeface="Arial"/>
-                <a:cs typeface="Arial"/>
-                <a:sym typeface="Arial"/>
-              </a:defRPr>
-            </a:lvl8pPr>
-            <a:lvl9pPr marR="0" lvl="8" algn="l" rtl="0">
-              <a:lnSpc>
-                <a:spcPct val="100000"/>
-              </a:lnSpc>
-              <a:spcBef>
-                <a:spcPts val="0"/>
-              </a:spcBef>
-              <a:spcAft>
-                <a:spcPts val="0"/>
-              </a:spcAft>
-              <a:buClr>
-                <a:srgbClr val="000000"/>
-              </a:buClr>
-              <a:buSzPts val="2500"/>
-              <a:buFont typeface="Arial"/>
-              <a:buNone/>
-              <a:defRPr sz="2500" b="1" i="0" u="none" strike="noStrike" cap="none">
-                <a:solidFill>
-                  <a:srgbClr val="000000"/>
-                </a:solidFill>
-                <a:latin typeface="Candara" panose="020E0502030303020204" pitchFamily="34" charset="0"/>
-                <a:ea typeface="Arial"/>
-                <a:cs typeface="Arial"/>
-                <a:sym typeface="Arial"/>
-              </a:defRPr>
-            </a:lvl9pPr>
-          </a:lstStyle>
-          <a:p>
-            <a:pPr algn="ctr"/>
-            <a:r>
-              <a:rPr lang="en-GB" sz="2800" dirty="0"/>
-              <a:t>Thank you!</a:t>
-            </a:r>
-          </a:p>
-        </p:txBody>
-      </p:sp>
-    </p:spTree>
-    <p:extLst>
-      <p:ext uri="{BB962C8B-B14F-4D97-AF65-F5344CB8AC3E}">
-        <p14:creationId xmlns:p14="http://schemas.microsoft.com/office/powerpoint/2010/main" val="3611274947"/>
       </p:ext>
     </p:extLst>
   </p:cSld>
